--- a/Customer_Behavior_Project.pptx
+++ b/Customer_Behavior_Project.pptx
@@ -2647,7 +2647,19 @@
                 <a:ea typeface="Calibri" pitchFamily="34" charset="-122"/>
                 <a:cs typeface="Calibri" pitchFamily="34" charset="-120"/>
               </a:rPr>
-              <a:t>GitHub:</a:t>
+              <a:t>GitHub : </a:t>
+            </a:r>
+            <a:r>
+              <a:rPr lang="en-US" sz="1200" dirty="0">
+                <a:solidFill>
+                  <a:srgbClr val="607A8F"/>
+                </a:solidFill>
+                <a:latin typeface="Calibri" pitchFamily="34" charset="0"/>
+                <a:ea typeface="Calibri" pitchFamily="34" charset="-122"/>
+                <a:cs typeface="Calibri" pitchFamily="34" charset="-120"/>
+                <a:hlinkClick r:id="rId3"/>
+              </a:rPr>
+              <a:t>https://github.com/KUMARabhishek2005/Customer-Behavior-Analysis-Dashboard</a:t>
             </a:r>
             <a:endParaRPr lang="en-US" sz="1200" dirty="0"/>
           </a:p>
@@ -2662,21 +2674,18 @@
         <p:spPr>
           <a:xfrm>
             <a:off x="457200" y="4462272"/>
-            <a:ext cx="8229600" cy="274320"/>
-          </a:xfrm>
-          <a:prstGeom prst="rect">
-            <a:avLst/>
-          </a:prstGeom>
-          <a:noFill/>
-          <a:ln/>
-        </p:spPr>
-        <p:txBody>
-          <a:bodyPr wrap="square" rtlCol="0" anchor="ctr"/>
-          <a:lstStyle/>
-          <a:p>
-            <a:pPr marL="0" indent="0">
-              <a:buNone/>
-            </a:pPr>
+            <a:ext cx="8229600" cy="681228"/>
+          </a:xfrm>
+          <a:prstGeom prst="rect">
+            <a:avLst/>
+          </a:prstGeom>
+          <a:noFill/>
+          <a:ln/>
+        </p:spPr>
+        <p:txBody>
+          <a:bodyPr wrap="square" rtlCol="0" anchor="ctr"/>
+          <a:lstStyle/>
+          <a:p>
             <a:r>
               <a:rPr lang="en-US" sz="1200" dirty="0">
                 <a:solidFill>
@@ -2686,7 +2695,19 @@
                 <a:ea typeface="Calibri" pitchFamily="34" charset="-122"/>
                 <a:cs typeface="Calibri" pitchFamily="34" charset="-120"/>
               </a:rPr>
-              <a:t>LinkedIn:</a:t>
+              <a:t>LinkedIn:  </a:t>
+            </a:r>
+            <a:r>
+              <a:rPr lang="en-US" sz="1200" dirty="0">
+                <a:solidFill>
+                  <a:srgbClr val="607A8F"/>
+                </a:solidFill>
+                <a:latin typeface="Calibri" pitchFamily="34" charset="0"/>
+                <a:ea typeface="Calibri" pitchFamily="34" charset="-122"/>
+                <a:cs typeface="Calibri" pitchFamily="34" charset="-120"/>
+                <a:hlinkClick r:id="rId4"/>
+              </a:rPr>
+              <a:t>https://www.linkedin.com/posts/abhishek-kumar-2a746a247_powerbi-sql-postgresql-ugcPost-7468193832061485057-j7Be/?utm_source=share&amp;utm_medium=member_desktop&amp;rcm=ACoAAD0dSx8BG4yGkSsXdkMCPaNxmJEc667Q35c</a:t>
             </a:r>
             <a:endParaRPr lang="en-US" sz="1200" dirty="0"/>
           </a:p>
